--- a/presentation/IPL_Crunch_26_PPT.pptx
+++ b/presentation/IPL_Crunch_26_PPT.pptx
@@ -9373,33 +9373,6 @@
           </a:p>
         </p:txBody>
       </p:sp>
-      <p:pic>
-        <p:nvPicPr>
-          <p:cNvPr id="406" name="Google Shape;406;p13"/>
-          <p:cNvPicPr preferRelativeResize="0"/>
-          <p:nvPr/>
-        </p:nvPicPr>
-        <p:blipFill rotWithShape="1">
-          <a:blip r:embed="rId3">
-            <a:alphaModFix/>
-          </a:blip>
-          <a:srcRect/>
-          <a:stretch/>
-        </p:blipFill>
-        <p:spPr>
-          <a:xfrm>
-            <a:off x="457200" y="2606040"/>
-            <a:ext cx="5029200" cy="2377440"/>
-          </a:xfrm>
-          <a:prstGeom prst="rect">
-            <a:avLst/>
-          </a:prstGeom>
-          <a:noFill/>
-          <a:ln>
-            <a:noFill/>
-          </a:ln>
-        </p:spPr>
-      </p:pic>
       <p:sp>
         <p:nvSpPr>
           <p:cNvPr id="407" name="Google Shape;407;p13"/>
@@ -10138,6 +10111,36 @@
           </a:p>
         </p:txBody>
       </p:sp>
+      <p:pic>
+        <p:nvPicPr>
+          <p:cNvPr id="3" name="Picture 2">
+            <a:extLst>
+              <a:ext uri="{FF2B5EF4-FFF2-40B4-BE49-F238E27FC236}">
+                <a16:creationId xmlns:a16="http://schemas.microsoft.com/office/drawing/2014/main" id="{D0703793-ADA5-FEFE-C403-054B1D83307D}"/>
+              </a:ext>
+            </a:extLst>
+          </p:cNvPr>
+          <p:cNvPicPr>
+            <a:picLocks noChangeAspect="1"/>
+          </p:cNvPicPr>
+          <p:nvPr/>
+        </p:nvPicPr>
+        <p:blipFill>
+          <a:blip r:embed="rId3"/>
+          <a:stretch>
+            <a:fillRect/>
+          </a:stretch>
+        </p:blipFill>
+        <p:spPr>
+          <a:xfrm>
+            <a:off x="1365206" y="2698030"/>
+            <a:ext cx="3444538" cy="2110923"/>
+          </a:xfrm>
+          <a:prstGeom prst="rect">
+            <a:avLst/>
+          </a:prstGeom>
+        </p:spPr>
+      </p:pic>
     </p:spTree>
   </p:cSld>
   <p:clrMapOvr>
@@ -11255,33 +11258,6 @@
           </a:p>
         </p:txBody>
       </p:sp>
-      <p:pic>
-        <p:nvPicPr>
-          <p:cNvPr id="441" name="Google Shape;441;p14"/>
-          <p:cNvPicPr preferRelativeResize="0"/>
-          <p:nvPr/>
-        </p:nvPicPr>
-        <p:blipFill rotWithShape="1">
-          <a:blip r:embed="rId3">
-            <a:alphaModFix/>
-          </a:blip>
-          <a:srcRect/>
-          <a:stretch/>
-        </p:blipFill>
-        <p:spPr>
-          <a:xfrm>
-            <a:off x="457200" y="2606040"/>
-            <a:ext cx="5029200" cy="2377440"/>
-          </a:xfrm>
-          <a:prstGeom prst="rect">
-            <a:avLst/>
-          </a:prstGeom>
-          <a:noFill/>
-          <a:ln>
-            <a:noFill/>
-          </a:ln>
-        </p:spPr>
-      </p:pic>
       <p:sp>
         <p:nvSpPr>
           <p:cNvPr id="442" name="Google Shape;442;p14"/>
@@ -12020,6 +11996,36 @@
           </a:p>
         </p:txBody>
       </p:sp>
+      <p:pic>
+        <p:nvPicPr>
+          <p:cNvPr id="3" name="Picture 2">
+            <a:extLst>
+              <a:ext uri="{FF2B5EF4-FFF2-40B4-BE49-F238E27FC236}">
+                <a16:creationId xmlns:a16="http://schemas.microsoft.com/office/drawing/2014/main" id="{AD936DD7-9C18-08B0-8239-1ED69F013DB5}"/>
+              </a:ext>
+            </a:extLst>
+          </p:cNvPr>
+          <p:cNvPicPr>
+            <a:picLocks noChangeAspect="1"/>
+          </p:cNvPicPr>
+          <p:nvPr/>
+        </p:nvPicPr>
+        <p:blipFill>
+          <a:blip r:embed="rId3"/>
+          <a:stretch>
+            <a:fillRect/>
+          </a:stretch>
+        </p:blipFill>
+        <p:spPr>
+          <a:xfrm>
+            <a:off x="1371600" y="2714538"/>
+            <a:ext cx="3360711" cy="2034716"/>
+          </a:xfrm>
+          <a:prstGeom prst="rect">
+            <a:avLst/>
+          </a:prstGeom>
+        </p:spPr>
+      </p:pic>
     </p:spTree>
   </p:cSld>
   <p:clrMapOvr>
@@ -12921,7 +12927,7 @@
               <a:buNone/>
             </a:pPr>
             <a:r>
-              <a:rPr lang="en-US" sz="3800" b="1" i="0" u="none" strike="noStrike" cap="none">
+              <a:rPr lang="en-US" sz="3800" b="1" i="0" u="none" strike="noStrike" cap="none" dirty="0">
                 <a:solidFill>
                   <a:srgbClr val="E05A5A"/>
                 </a:solidFill>
@@ -12930,9 +12936,9 @@
                 <a:cs typeface="Arial Black"/>
                 <a:sym typeface="Arial Black"/>
               </a:rPr>
-              <a:t>11.4</a:t>
+              <a:t>10.75</a:t>
             </a:r>
-            <a:endParaRPr sz="3800" b="0" i="0" u="none" strike="noStrike" cap="none">
+            <a:endParaRPr sz="3800" b="0" i="0" u="none" strike="noStrike" cap="none" dirty="0">
               <a:solidFill>
                 <a:schemeClr val="dk1"/>
               </a:solidFill>
@@ -17584,33 +17590,6 @@
           </a:p>
         </p:txBody>
       </p:sp>
-      <p:pic>
-        <p:nvPicPr>
-          <p:cNvPr id="574" name="Google Shape;574;p18" descr="preencoded.png"/>
-          <p:cNvPicPr preferRelativeResize="0"/>
-          <p:nvPr/>
-        </p:nvPicPr>
-        <p:blipFill rotWithShape="1">
-          <a:blip r:embed="rId3">
-            <a:alphaModFix/>
-          </a:blip>
-          <a:srcRect/>
-          <a:stretch/>
-        </p:blipFill>
-        <p:spPr>
-          <a:xfrm>
-            <a:off x="7589520" y="2834640"/>
-            <a:ext cx="1005840" cy="1005840"/>
-          </a:xfrm>
-          <a:prstGeom prst="rect">
-            <a:avLst/>
-          </a:prstGeom>
-          <a:noFill/>
-          <a:ln>
-            <a:noFill/>
-          </a:ln>
-        </p:spPr>
-      </p:pic>
       <p:sp>
         <p:nvSpPr>
           <p:cNvPr id="575" name="Google Shape;575;p18"/>
@@ -29114,7 +29093,7 @@
               <a:buNone/>
             </a:pPr>
             <a:r>
-              <a:rPr lang="en-US" sz="3200" b="1" i="0" u="none" strike="noStrike" cap="none">
+              <a:rPr lang="en-US" sz="3200" b="1" i="0" u="none" strike="noStrike" cap="none" dirty="0">
                 <a:solidFill>
                   <a:srgbClr val="FFFFFF"/>
                 </a:solidFill>
@@ -29123,9 +29102,9 @@
                 <a:cs typeface="Arial Black"/>
                 <a:sym typeface="Arial Black"/>
               </a:rPr>
-              <a:t>Executive Dashboard</a:t>
+              <a:t>Dashboard</a:t>
             </a:r>
-            <a:endParaRPr sz="3200" b="0" i="0" u="none" strike="noStrike" cap="none">
+            <a:endParaRPr sz="3200" b="0" i="0" u="none" strike="noStrike" cap="none" dirty="0">
               <a:solidFill>
                 <a:schemeClr val="dk1"/>
               </a:solidFill>
@@ -30501,45 +30480,32 @@
       </p:sp>
       <p:pic>
         <p:nvPicPr>
-          <p:cNvPr id="288" name="Google Shape;288;p9" title="image 1.png"/>
-          <p:cNvPicPr preferRelativeResize="0"/>
+          <p:cNvPr id="3" name="Picture 2">
+            <a:extLst>
+              <a:ext uri="{FF2B5EF4-FFF2-40B4-BE49-F238E27FC236}">
+                <a16:creationId xmlns:a16="http://schemas.microsoft.com/office/drawing/2014/main" id="{5B98DB76-F229-C9E3-6694-4684BCECB371}"/>
+              </a:ext>
+            </a:extLst>
+          </p:cNvPr>
+          <p:cNvPicPr>
+            <a:picLocks noChangeAspect="1"/>
+          </p:cNvPicPr>
           <p:nvPr/>
         </p:nvPicPr>
         <p:blipFill>
-          <a:blip r:embed="rId3">
-            <a:alphaModFix/>
-          </a:blip>
+          <a:blip r:embed="rId3"/>
           <a:stretch>
             <a:fillRect/>
           </a:stretch>
         </p:blipFill>
         <p:spPr>
           <a:xfrm>
-            <a:off x="1094575" y="2532396"/>
-            <a:ext cx="3757526" cy="1895100"/>
-          </a:xfrm>
-          <a:prstGeom prst="rect">
-            <a:avLst/>
-          </a:prstGeom>
-          <a:solidFill>
-            <a:srgbClr val="112244"/>
-          </a:solidFill>
-          <a:ln w="9525" cap="flat" cmpd="sng">
-            <a:solidFill>
-              <a:srgbClr val="C8992A"/>
-            </a:solidFill>
-            <a:prstDash val="solid"/>
-            <a:round/>
-            <a:headEnd type="none" w="sm" len="sm"/>
-            <a:tailEnd type="none" w="sm" len="sm"/>
-          </a:ln>
-          <a:effectLst>
-            <a:outerShdw blurRad="127000" dist="38100" dir="8100000" algn="bl" rotWithShape="0">
-              <a:srgbClr val="000000">
-                <a:alpha val="25099"/>
-              </a:srgbClr>
-            </a:outerShdw>
-          </a:effectLst>
+            <a:off x="1098765" y="2447099"/>
+            <a:ext cx="3837509" cy="2164334"/>
+          </a:xfrm>
+          <a:prstGeom prst="rect">
+            <a:avLst/>
+          </a:prstGeom>
         </p:spPr>
       </p:pic>
     </p:spTree>
@@ -31246,7 +31212,7 @@
               <a:buNone/>
             </a:pPr>
             <a:r>
-              <a:rPr lang="en-US" sz="3200" b="1" i="0" u="none" strike="noStrike" cap="none">
+              <a:rPr lang="en-US" sz="3200" b="1" i="0" u="none" strike="noStrike" cap="none" dirty="0">
                 <a:solidFill>
                   <a:srgbClr val="E8B84B"/>
                 </a:solidFill>
@@ -31255,9 +31221,9 @@
                 <a:cs typeface="Arial Black"/>
                 <a:sym typeface="Arial Black"/>
               </a:rPr>
-              <a:t>161.4</a:t>
+              <a:t>176</a:t>
             </a:r>
-            <a:endParaRPr sz="3200" b="0" i="0" u="none" strike="noStrike" cap="none">
+            <a:endParaRPr sz="3200" b="0" i="0" u="none" strike="noStrike" cap="none" dirty="0">
               <a:solidFill>
                 <a:schemeClr val="dk1"/>
               </a:solidFill>
@@ -31511,33 +31477,6 @@
           </a:p>
         </p:txBody>
       </p:sp>
-      <p:pic>
-        <p:nvPicPr>
-          <p:cNvPr id="310" name="Google Shape;310;p10"/>
-          <p:cNvPicPr preferRelativeResize="0"/>
-          <p:nvPr/>
-        </p:nvPicPr>
-        <p:blipFill rotWithShape="1">
-          <a:blip r:embed="rId3">
-            <a:alphaModFix/>
-          </a:blip>
-          <a:srcRect/>
-          <a:stretch/>
-        </p:blipFill>
-        <p:spPr>
-          <a:xfrm>
-            <a:off x="457200" y="2651760"/>
-            <a:ext cx="5303520" cy="2286000"/>
-          </a:xfrm>
-          <a:prstGeom prst="rect">
-            <a:avLst/>
-          </a:prstGeom>
-          <a:noFill/>
-          <a:ln>
-            <a:noFill/>
-          </a:ln>
-        </p:spPr>
-      </p:pic>
       <p:sp>
         <p:nvSpPr>
           <p:cNvPr id="311" name="Google Shape;311;p10"/>
@@ -31749,7 +31688,7 @@
                 <a:cs typeface="Calibri"/>
                 <a:sym typeface="Calibri"/>
               </a:rPr>
-              <a:t>Scoring trends increased significantly over seasons, highlighting the aggressive modern IPL batting evolution. Average team score rose +13% from 2022 to 2026.</a:t>
+              <a:t>Scoring trends increased significantly over seasons, highlighting the aggressive modern IPL batting evolution. Average team score rose from 2022 to 2025.</a:t>
             </a:r>
             <a:endParaRPr sz="1050" b="0" i="0" u="none" strike="noStrike" cap="none" dirty="0">
               <a:solidFill>
@@ -31781,7 +31720,7 @@
           <a:blip>
             <a:extLst>
               <a:ext uri="{96DAC541-7B7A-43D3-8B79-37D633B846F1}">
-                <asvg:svgBlip xmlns:asvg="http://schemas.microsoft.com/office/drawing/2016/SVG/main" r:embed="rId4"/>
+                <asvg:svgBlip xmlns:asvg="http://schemas.microsoft.com/office/drawing/2016/SVG/main" r:embed="rId3"/>
               </a:ext>
             </a:extLst>
           </a:blip>
@@ -31793,6 +31732,36 @@
           <a:xfrm rot="10800000" flipV="1">
             <a:off x="6035040" y="2785720"/>
             <a:ext cx="537210" cy="537210"/>
+          </a:xfrm>
+          <a:prstGeom prst="rect">
+            <a:avLst/>
+          </a:prstGeom>
+        </p:spPr>
+      </p:pic>
+      <p:pic>
+        <p:nvPicPr>
+          <p:cNvPr id="4" name="Picture 3">
+            <a:extLst>
+              <a:ext uri="{FF2B5EF4-FFF2-40B4-BE49-F238E27FC236}">
+                <a16:creationId xmlns:a16="http://schemas.microsoft.com/office/drawing/2014/main" id="{F9C76504-9777-A7DA-7C69-19BBA0C3503A}"/>
+              </a:ext>
+            </a:extLst>
+          </p:cNvPr>
+          <p:cNvPicPr>
+            <a:picLocks noChangeAspect="1"/>
+          </p:cNvPicPr>
+          <p:nvPr/>
+        </p:nvPicPr>
+        <p:blipFill>
+          <a:blip r:embed="rId4"/>
+          <a:stretch>
+            <a:fillRect/>
+          </a:stretch>
+        </p:blipFill>
+        <p:spPr>
+          <a:xfrm>
+            <a:off x="1131292" y="2638045"/>
+            <a:ext cx="4046778" cy="2292510"/>
           </a:xfrm>
           <a:prstGeom prst="rect">
             <a:avLst/>
